--- a/examples/professional_demo/Financials_PRO_Tier.pptx
+++ b/examples/professional_demo/Financials_PRO_Tier.pptx
@@ -235,22 +235,22 @@
                 <c:formatCode>General</c:formatCode>
                 <c:ptCount val="6"/>
                 <c:pt idx="0">
-                  <c:v>27.8</c:v>
+                  <c:v>33011143.96</c:v>
                 </c:pt>
                 <c:pt idx="1">
-                  <c:v>17.28</c:v>
+                  <c:v>20511921.02</c:v>
                 </c:pt>
                 <c:pt idx="2">
-                  <c:v>15.37</c:v>
+                  <c:v>18250059.47</c:v>
                 </c:pt>
                 <c:pt idx="3">
-                  <c:v>14.95</c:v>
+                  <c:v>17747116.07</c:v>
                 </c:pt>
                 <c:pt idx="4">
-                  <c:v>12.96</c:v>
+                  <c:v>15390801.88</c:v>
                 </c:pt>
                 <c:pt idx="5">
-                  <c:v>11.64</c:v>
+                  <c:v>13815307.89</c:v>
                 </c:pt>
               </c:numCache>
             </c:numRef>
@@ -393,22 +393,22 @@
                 <c:formatCode>General</c:formatCode>
                 <c:ptCount val="6"/>
                 <c:pt idx="0">
-                  <c:v>14.95</c:v>
+                  <c:v>17747116.07</c:v>
                 </c:pt>
                 <c:pt idx="1">
-                  <c:v>11.64</c:v>
+                  <c:v>13815307.89</c:v>
                 </c:pt>
                 <c:pt idx="2">
-                  <c:v>12.96</c:v>
+                  <c:v>15390801.88</c:v>
                 </c:pt>
                 <c:pt idx="3">
-                  <c:v>27.8</c:v>
+                  <c:v>33011143.96</c:v>
                 </c:pt>
                 <c:pt idx="4">
-                  <c:v>17.28</c:v>
+                  <c:v>20511921.02</c:v>
                 </c:pt>
                 <c:pt idx="5">
-                  <c:v>15.37</c:v>
+                  <c:v>18250059.47</c:v>
                 </c:pt>
               </c:numCache>
             </c:numRef>
@@ -615,6 +615,7 @@
 
 <file path=ppt/charts/chart3.xml><?xml version="1.0" encoding="utf-8"?>
 <c:chartSpace xmlns:c="http://schemas.openxmlformats.org/drawingml/2006/chart" xmlns:a="http://schemas.openxmlformats.org/drawingml/2006/main" xmlns:r="http://schemas.openxmlformats.org/officeDocument/2006/relationships">
+  <c:date1904 val="0"/>
   <c:chart>
     <c:title>
       <c:tx>
@@ -626,7 +627,7 @@
               <a:defRPr sz="1600" b="1"/>
             </a:pPr>
             <a:r>
-              <a:t>Category Distribution</a:t>
+              <a:t>Distribution by Sector</a:t>
             </a:r>
           </a:p>
         </c:rich>
@@ -636,8 +637,9 @@
     </c:title>
     <c:autoTitleDeleted val="0"/>
     <c:plotArea>
-      <c:pieChart>
-        <c:varyColors val="1"/>
+      <c:barChart>
+        <c:barDir val="bar"/>
+        <c:grouping val="clustered"/>
         <c:ser>
           <c:idx val="0"/>
           <c:order val="0"/>
@@ -660,12 +662,67 @@
               </a:solidFill>
             </c:spPr>
           </c:dPt>
+          <c:dPt>
+            <c:idx val="1"/>
+            <c:spPr>
+              <a:solidFill>
+                <a:srgbClr val="2E7D32"/>
+              </a:solidFill>
+            </c:spPr>
+          </c:dPt>
+          <c:dPt>
+            <c:idx val="2"/>
+            <c:spPr>
+              <a:solidFill>
+                <a:srgbClr val="FFC107"/>
+              </a:solidFill>
+            </c:spPr>
+          </c:dPt>
+          <c:dPt>
+            <c:idx val="3"/>
+            <c:spPr>
+              <a:solidFill>
+                <a:srgbClr val="D32F2F"/>
+              </a:solidFill>
+            </c:spPr>
+          </c:dPt>
+          <c:dPt>
+            <c:idx val="4"/>
+            <c:spPr>
+              <a:solidFill>
+                <a:srgbClr val="9C27B0"/>
+              </a:solidFill>
+            </c:spPr>
+          </c:dPt>
+          <c:dPt>
+            <c:idx val="5"/>
+            <c:spPr>
+              <a:solidFill>
+                <a:srgbClr val="FF9800"/>
+              </a:solidFill>
+            </c:spPr>
+          </c:dPt>
           <c:cat>
             <c:strRef>
-              <c:f>Sheet1!$A$2:$A$2</c:f>
+              <c:f>Sheet1!$A$2:$A$7</c:f>
               <c:strCache>
-                <c:ptCount val="1"/>
+                <c:ptCount val="6"/>
                 <c:pt idx="0">
+                  <c:v>Consumer Goods</c:v>
+                </c:pt>
+                <c:pt idx="1">
+                  <c:v>Consumer Goods</c:v>
+                </c:pt>
+                <c:pt idx="2">
+                  <c:v>Consumer Goods</c:v>
+                </c:pt>
+                <c:pt idx="3">
+                  <c:v>Consumer Goods</c:v>
+                </c:pt>
+                <c:pt idx="4">
+                  <c:v>Consumer Goods</c:v>
+                </c:pt>
+                <c:pt idx="5">
                   <c:v>Consumer Goods</c:v>
                 </c:pt>
               </c:strCache>
@@ -673,31 +730,76 @@
           </c:cat>
           <c:val>
             <c:numRef>
-              <c:f>Sheet1!$B$2:$B$2</c:f>
+              <c:f>Sheet1!$B$2:$B$7</c:f>
               <c:numCache>
                 <c:formatCode>General</c:formatCode>
-                <c:ptCount val="1"/>
+                <c:ptCount val="6"/>
                 <c:pt idx="0">
-                  <c:v>6</c:v>
+                  <c:v>33011143.96</c:v>
+                </c:pt>
+                <c:pt idx="1">
+                  <c:v>20511921.02</c:v>
+                </c:pt>
+                <c:pt idx="2">
+                  <c:v>18250059.47</c:v>
+                </c:pt>
+                <c:pt idx="3">
+                  <c:v>17747116.07</c:v>
+                </c:pt>
+                <c:pt idx="4">
+                  <c:v>15390801.88</c:v>
+                </c:pt>
+                <c:pt idx="5">
+                  <c:v>13815307.89</c:v>
                 </c:pt>
               </c:numCache>
             </c:numRef>
           </c:val>
         </c:ser>
-        <c:dLbls>
-          <c:showLegendKey val="0"/>
-          <c:showVal val="1"/>
-          <c:showCatName val="1"/>
-          <c:showSerName val="0"/>
-          <c:showPercent val="1"/>
-          <c:showBubbleSize val="0"/>
-          <c:showLeaderLines val="1"/>
-        </c:dLbls>
-      </c:pieChart>
+        <c:axId val="-2068027336"/>
+        <c:axId val="-2113994440"/>
+      </c:barChart>
+      <c:catAx>
+        <c:axId val="-2068027336"/>
+        <c:scaling>
+          <c:orientation val="minMax"/>
+        </c:scaling>
+        <c:delete val="0"/>
+        <c:axPos val="l"/>
+        <c:majorTickMark val="out"/>
+        <c:minorTickMark val="none"/>
+        <c:tickLblPos val="nextTo"/>
+        <c:crossAx val="-2113994440"/>
+        <c:crosses val="autoZero"/>
+        <c:auto val="1"/>
+        <c:lblAlgn val="ctr"/>
+        <c:lblOffset val="100"/>
+        <c:noMultiLvlLbl val="0"/>
+      </c:catAx>
+      <c:valAx>
+        <c:axId val="-2113994440"/>
+        <c:scaling/>
+        <c:delete val="0"/>
+        <c:axPos val="b"/>
+        <c:majorGridlines/>
+        <c:majorTickMark val="out"/>
+        <c:minorTickMark val="none"/>
+        <c:tickLblPos val="nextTo"/>
+        <c:crossAx val="-2068027336"/>
+        <c:crosses val="autoZero"/>
+      </c:valAx>
     </c:plotArea>
     <c:legend>
       <c:legendPos/>
-      <c:overlay val="0"/>
+      <c:txPr>
+        <a:bodyPr/>
+        <a:lstStyle/>
+        <a:p>
+          <a:pPr>
+            <a:defRPr sz="900"/>
+          </a:pPr>
+        </a:p>
+      </c:txPr>
     </c:legend>
     <c:dispBlanksAs val="gap"/>
   </c:chart>
@@ -4004,7 +4106,7 @@
               </a:defRPr>
             </a:pPr>
             <a:r>
-              <a:t>✓  Paseo  leads with $27.80 in MarketCap</a:t>
+              <a:t>✓  Paseo  leads with $33.01M in MarketCap</a:t>
             </a:r>
           </a:p>
           <a:p>
@@ -4191,7 +4293,7 @@
               </a:defRPr>
             </a:pPr>
             <a:r>
-              <a:t>Total Market Cap</a:t>
+              <a:t>Total Market Cap (Millions)</a:t>
             </a:r>
           </a:p>
         </p:txBody>
@@ -4226,7 +4328,7 @@
               </a:defRPr>
             </a:pPr>
             <a:r>
-              <a:t>$0.0B</a:t>
+              <a:t>$118.73M</a:t>
             </a:r>
           </a:p>
         </p:txBody>
@@ -4925,7 +5027,7 @@
               </a:defRPr>
             </a:pPr>
             <a:r>
-              <a:t>💡 Key Insight: Consumer Goods represents the entire market share at 100%.</a:t>
+              <a:t>💡 Key Insight: Consumer Goods: 6 out of 6 entities (100.0%)</a:t>
             </a:r>
           </a:p>
         </p:txBody>
